--- a/docs/MaRe_Luxury_Growth_Engine.pptx
+++ b/docs/MaRe_Luxury_Growth_Engine.pptx
@@ -3482,7 +3482,7 @@
               </a:defRPr>
             </a:pPr>
             <a:r>
-              <a:t>Integrate real multimodal generation for image and video content.</a:t>
+              <a:t>Integrate real multimodal generation and fully signed AWS uploads for images and video assets.</a:t>
             </a:r>
           </a:p>
           <a:p>
@@ -4592,7 +4592,7 @@
               </a:defRPr>
             </a:pPr>
             <a:r>
-              <a:t>Simple Next.js app designed for easy Vercel deployment.</a:t>
+              <a:t>Simple Flask + Python app for the lightweight web version.</a:t>
             </a:r>
           </a:p>
           <a:p>
@@ -4607,7 +4607,7 @@
               </a:defRPr>
             </a:pPr>
             <a:r>
-              <a:t>Uses API routes for backend behavior and an in-repo agent module for guarded output.</a:t>
+              <a:t>Includes Flask routes, a Vercel-compatible Python entrypoint, and AWS S3-oriented image storage.</a:t>
             </a:r>
           </a:p>
           <a:p>
@@ -5060,7 +5060,7 @@
               </a:defRPr>
             </a:pPr>
             <a:r>
-              <a:t>Shared domain model: prospect, outreach, content, review, AI error.</a:t>
+              <a:t>Shared domain model: prospect, outreach, content, review, AI error, and image storage.</a:t>
             </a:r>
           </a:p>
           <a:p>

--- a/docs/MaRe_Luxury_Growth_Engine.pptx
+++ b/docs/MaRe_Luxury_Growth_Engine.pptx
@@ -3225,7 +3225,7 @@
               </a:defRPr>
             </a:pPr>
             <a:r>
-              <a:t>MaRe Luxury Growth Engine</a:t>
+              <a:t>MaRe</a:t>
             </a:r>
           </a:p>
         </p:txBody>
@@ -3263,7 +3263,7 @@
               </a:defRPr>
             </a:pPr>
             <a:r>
-              <a:t>Scaling a Miami luxury scalp-health brand into a national authority</a:t>
+              <a:t>One luxury scalp-health app with guest, internal, salon-owner, and client experiences</a:t>
             </a:r>
           </a:p>
           <a:p>
@@ -3278,7 +3278,7 @@
               </a:defRPr>
             </a:pPr>
             <a:r>
-              <a:t>Hackathon solution across Flutter, web, backend, and AI agent layers</a:t>
+              <a:t>Hackathon solution across Flutter, Flask, backend, AI agent, and AWS storage layers</a:t>
             </a:r>
           </a:p>
         </p:txBody>
@@ -4139,7 +4139,7 @@
               </a:defRPr>
             </a:pPr>
             <a:r>
-              <a:t>Global Prospector: find the right salons.</a:t>
+              <a:t>Guest mode for public discovery.</a:t>
             </a:r>
           </a:p>
           <a:p>
@@ -4154,7 +4154,7 @@
               </a:defRPr>
             </a:pPr>
             <a:r>
-              <a:t>Luxury Outreach Engine: draft outreach that sounds human.</a:t>
+              <a:t>One sign-in for all MaRe roles.</a:t>
             </a:r>
           </a:p>
           <a:p>
@@ -4169,7 +4169,7 @@
               </a:defRPr>
             </a:pPr>
             <a:r>
-              <a:t>Creative Engine: generate AI-search-ready content at scale.</a:t>
+              <a:t>Role picker for internal, salon-owner, and client dashboards.</a:t>
             </a:r>
           </a:p>
           <a:p>
@@ -4184,7 +4184,7 @@
               </a:defRPr>
             </a:pPr>
             <a:r>
-              <a:t>Approval Queue: keep founders and ops in control.</a:t>
+              <a:t>Shared AI, storage, and review systems under one app shell.</a:t>
             </a:r>
           </a:p>
         </p:txBody>
@@ -4373,7 +4373,7 @@
               </a:defRPr>
             </a:pPr>
             <a:r>
-              <a:t>Premium founder-facing demo built in Flutter.</a:t>
+              <a:t>One MaRe shell across iOS, Android, and Web.</a:t>
             </a:r>
           </a:p>
           <a:p>
@@ -4388,7 +4388,7 @@
               </a:defRPr>
             </a:pPr>
             <a:r>
-              <a:t>Shows prospect ranking, luxury outreach, content engine, AI watchtower, and approval queue.</a:t>
+              <a:t>Shows guest mode, sign-in, role selection, and role-specific dashboards.</a:t>
             </a:r>
           </a:p>
           <a:p>
